--- a/3-大二上/计算机组成原理/PPT（吴晓华）/CH2-4补码一位乘运算方法.pptx
+++ b/3-大二上/计算机组成原理/PPT（吴晓华）/CH2-4补码一位乘运算方法.pptx
@@ -8,7 +8,7 @@
     <p:notesMasterId r:id="rId4"/>
   </p:notesMasterIdLst>
   <p:handoutMasterIdLst>
-    <p:handoutMasterId r:id="rId13"/>
+    <p:handoutMasterId r:id="rId14"/>
   </p:handoutMasterIdLst>
   <p:sldIdLst>
     <p:sldId id="316" r:id="rId3"/>
@@ -19,12 +19,13 @@
     <p:sldId id="320" r:id="rId9"/>
     <p:sldId id="374" r:id="rId10"/>
     <p:sldId id="375" r:id="rId11"/>
-    <p:sldId id="376" r:id="rId12"/>
+    <p:sldId id="381" r:id="rId12"/>
+    <p:sldId id="376" r:id="rId13"/>
   </p:sldIdLst>
   <p:sldSz cx="9144000" cy="6858000" type="screen4x3"/>
   <p:notesSz cx="6858000" cy="9144000"/>
   <p:custDataLst>
-    <p:tags r:id="rId17"/>
+    <p:tags r:id="rId18"/>
   </p:custDataLst>
   <p:defaultTextStyle>
     <a:defPPr>
@@ -4773,7 +4774,27 @@
                 <a:latin typeface="楷体" panose="02010609060101010101" pitchFamily="49" charset="-122"/>
                 <a:ea typeface="楷体" panose="02010609060101010101" pitchFamily="49" charset="-122"/>
               </a:rPr>
-              <a:t>操作数与结果均以补码表示，连同符号位一起，按相应算法运算。</a:t>
+              <a:t>操作数与结果均以补码表示，</a:t>
+            </a:r>
+            <a:r>
+              <a:rPr lang="zh-CN" altLang="en-US" sz="2800" b="1" dirty="0">
+                <a:solidFill>
+                  <a:srgbClr val="FF0000"/>
+                </a:solidFill>
+                <a:highlight>
+                  <a:srgbClr val="FFFF00"/>
+                </a:highlight>
+                <a:latin typeface="楷体" panose="02010609060101010101" pitchFamily="49" charset="-122"/>
+                <a:ea typeface="楷体" panose="02010609060101010101" pitchFamily="49" charset="-122"/>
+              </a:rPr>
+              <a:t>连同符号位</a:t>
+            </a:r>
+            <a:r>
+              <a:rPr lang="zh-CN" altLang="en-US" sz="2800" b="1" dirty="0">
+                <a:latin typeface="楷体" panose="02010609060101010101" pitchFamily="49" charset="-122"/>
+                <a:ea typeface="楷体" panose="02010609060101010101" pitchFamily="49" charset="-122"/>
+              </a:rPr>
+              <a:t>一起，按相应算法运算。</a:t>
             </a:r>
             <a:endParaRPr lang="en-US" altLang="zh-CN" sz="2800" b="1" dirty="0">
               <a:latin typeface="楷体" panose="02010609060101010101" pitchFamily="49" charset="-122"/>
@@ -5494,6 +5515,290 @@
 </p:sld>
 </file>
 
+<file path=ppt/slides/slide10.xml><?xml version="1.0" encoding="utf-8"?>
+<p:sld xmlns:a="http://schemas.openxmlformats.org/drawingml/2006/main" xmlns:r="http://schemas.openxmlformats.org/officeDocument/2006/relationships" xmlns:p="http://schemas.openxmlformats.org/presentationml/2006/main">
+  <p:cSld>
+    <p:spTree>
+      <p:nvGrpSpPr>
+        <p:cNvPr id="1" name=""/>
+        <p:cNvGrpSpPr/>
+        <p:nvPr/>
+      </p:nvGrpSpPr>
+      <p:grpSpPr/>
+      <p:sp>
+        <p:nvSpPr>
+          <p:cNvPr id="257026" name="Text Box 2"/>
+          <p:cNvSpPr txBox="1"/>
+          <p:nvPr/>
+        </p:nvSpPr>
+        <p:spPr>
+          <a:xfrm>
+            <a:off x="107950" y="116840"/>
+            <a:ext cx="5562600" cy="641350"/>
+          </a:xfrm>
+          <a:prstGeom prst="rect">
+            <a:avLst/>
+          </a:prstGeom>
+          <a:noFill/>
+          <a:ln w="9525">
+            <a:noFill/>
+          </a:ln>
+        </p:spPr>
+        <p:txBody>
+          <a:bodyPr>
+            <a:spAutoFit/>
+          </a:bodyPr>
+          <a:p>
+            <a:pPr>
+              <a:spcBef>
+                <a:spcPct val="50000"/>
+              </a:spcBef>
+            </a:pPr>
+            <a:r>
+              <a:rPr lang="en-US" altLang="zh-CN" sz="3600" b="1" dirty="0">
+                <a:latin typeface="Times New Roman" panose="02020603050405020304" pitchFamily="18" charset="0"/>
+              </a:rPr>
+              <a:t>3. </a:t>
+            </a:r>
+            <a:r>
+              <a:rPr lang="zh-CN" altLang="en-US" sz="3600" b="1" dirty="0">
+                <a:latin typeface="Times New Roman" panose="02020603050405020304" pitchFamily="18" charset="0"/>
+                <a:ea typeface="黑体" panose="02010609060101010101" pitchFamily="49" charset="-122"/>
+              </a:rPr>
+              <a:t>逻辑实现</a:t>
+            </a:r>
+            <a:endParaRPr lang="zh-CN" altLang="en-US" sz="3600" b="1" dirty="0">
+              <a:latin typeface="Times New Roman" panose="02020603050405020304" pitchFamily="18" charset="0"/>
+              <a:ea typeface="黑体" panose="02010609060101010101" pitchFamily="49" charset="-122"/>
+            </a:endParaRPr>
+          </a:p>
+        </p:txBody>
+      </p:sp>
+      <p:pic>
+        <p:nvPicPr>
+          <p:cNvPr id="4" name="图片 3"/>
+          <p:cNvPicPr>
+            <a:picLocks noChangeAspect="1"/>
+          </p:cNvPicPr>
+          <p:nvPr/>
+        </p:nvPicPr>
+        <p:blipFill>
+          <a:blip r:embed="rId1"/>
+          <a:stretch>
+            <a:fillRect/>
+          </a:stretch>
+        </p:blipFill>
+        <p:spPr>
+          <a:xfrm>
+            <a:off x="213360" y="845185"/>
+            <a:ext cx="8395335" cy="5561330"/>
+          </a:xfrm>
+          <a:prstGeom prst="rect">
+            <a:avLst/>
+          </a:prstGeom>
+        </p:spPr>
+      </p:pic>
+    </p:spTree>
+  </p:cSld>
+  <p:clrMapOvr>
+    <a:masterClrMapping/>
+  </p:clrMapOvr>
+  <p:timing>
+    <p:tnLst>
+      <p:par>
+        <p:cTn id="1" dur="indefinite" restart="never" nodeType="tmRoot">
+          <p:childTnLst>
+            <p:seq concurrent="1" nextAc="seek">
+              <p:cTn id="2" dur="indefinite" nodeType="mainSeq">
+                <p:childTnLst>
+                  <p:par>
+                    <p:cTn id="3" fill="hold">
+                      <p:stCondLst>
+                        <p:cond delay="indefinite"/>
+                      </p:stCondLst>
+                      <p:childTnLst>
+                        <p:par>
+                          <p:cTn id="4" fill="hold">
+                            <p:stCondLst>
+                              <p:cond delay="0"/>
+                            </p:stCondLst>
+                            <p:childTnLst>
+                              <p:par>
+                                <p:cTn id="5" presetID="22" presetClass="entr" presetSubtype="8" fill="hold" grpId="0" nodeType="clickEffect">
+                                  <p:stCondLst>
+                                    <p:cond delay="0"/>
+                                  </p:stCondLst>
+                                  <p:childTnLst>
+                                    <p:set>
+                                      <p:cBhvr>
+                                        <p:cTn id="6" dur="1" fill="hold">
+                                          <p:stCondLst>
+                                            <p:cond delay="0"/>
+                                          </p:stCondLst>
+                                        </p:cTn>
+                                        <p:tgtEl>
+                                          <p:spTgt spid="257026">
+                                            <p:txEl>
+                                              <p:charRg st="0" end="8"/>
+                                            </p:txEl>
+                                          </p:spTgt>
+                                        </p:tgtEl>
+                                        <p:attrNameLst>
+                                          <p:attrName>style.visibility</p:attrName>
+                                        </p:attrNameLst>
+                                      </p:cBhvr>
+                                      <p:to>
+                                        <p:strVal val="visible"/>
+                                      </p:to>
+                                    </p:set>
+                                    <p:animEffect transition="in" filter="wipe(left)">
+                                      <p:cBhvr>
+                                        <p:cTn id="7" dur="500"/>
+                                        <p:tgtEl>
+                                          <p:spTgt spid="257026">
+                                            <p:txEl>
+                                              <p:charRg st="0" end="8"/>
+                                            </p:txEl>
+                                          </p:spTgt>
+                                        </p:tgtEl>
+                                      </p:cBhvr>
+                                    </p:animEffect>
+                                  </p:childTnLst>
+                                </p:cTn>
+                              </p:par>
+                            </p:childTnLst>
+                          </p:cTn>
+                        </p:par>
+                      </p:childTnLst>
+                    </p:cTn>
+                  </p:par>
+                  <p:par>
+                    <p:cTn id="8" fill="hold">
+                      <p:stCondLst>
+                        <p:cond delay="indefinite"/>
+                      </p:stCondLst>
+                      <p:childTnLst>
+                        <p:par>
+                          <p:cTn id="9" fill="hold">
+                            <p:stCondLst>
+                              <p:cond delay="0"/>
+                            </p:stCondLst>
+                            <p:childTnLst>
+                              <p:par>
+                                <p:cTn id="10" presetID="53" presetClass="entr" presetSubtype="16" fill="hold" nodeType="clickEffect">
+                                  <p:stCondLst>
+                                    <p:cond delay="0"/>
+                                  </p:stCondLst>
+                                  <p:childTnLst>
+                                    <p:set>
+                                      <p:cBhvr>
+                                        <p:cTn id="11" dur="1" fill="hold">
+                                          <p:stCondLst>
+                                            <p:cond delay="0"/>
+                                          </p:stCondLst>
+                                        </p:cTn>
+                                        <p:tgtEl>
+                                          <p:spTgt spid="4"/>
+                                        </p:tgtEl>
+                                        <p:attrNameLst>
+                                          <p:attrName>style.visibility</p:attrName>
+                                        </p:attrNameLst>
+                                      </p:cBhvr>
+                                      <p:to>
+                                        <p:strVal val="visible"/>
+                                      </p:to>
+                                    </p:set>
+                                    <p:anim calcmode="lin" valueType="num">
+                                      <p:cBhvr>
+                                        <p:cTn id="12" dur="500" fill="hold"/>
+                                        <p:tgtEl>
+                                          <p:spTgt spid="4"/>
+                                        </p:tgtEl>
+                                        <p:attrNameLst>
+                                          <p:attrName>ppt_w</p:attrName>
+                                        </p:attrNameLst>
+                                      </p:cBhvr>
+                                      <p:tavLst>
+                                        <p:tav tm="0">
+                                          <p:val>
+                                            <p:fltVal val="0"/>
+                                          </p:val>
+                                        </p:tav>
+                                        <p:tav tm="100000">
+                                          <p:val>
+                                            <p:strVal val="#ppt_w"/>
+                                          </p:val>
+                                        </p:tav>
+                                      </p:tavLst>
+                                    </p:anim>
+                                    <p:anim calcmode="lin" valueType="num">
+                                      <p:cBhvr>
+                                        <p:cTn id="13" dur="500" fill="hold"/>
+                                        <p:tgtEl>
+                                          <p:spTgt spid="4"/>
+                                        </p:tgtEl>
+                                        <p:attrNameLst>
+                                          <p:attrName>ppt_h</p:attrName>
+                                        </p:attrNameLst>
+                                      </p:cBhvr>
+                                      <p:tavLst>
+                                        <p:tav tm="0">
+                                          <p:val>
+                                            <p:fltVal val="0"/>
+                                          </p:val>
+                                        </p:tav>
+                                        <p:tav tm="100000">
+                                          <p:val>
+                                            <p:strVal val="#ppt_h"/>
+                                          </p:val>
+                                        </p:tav>
+                                      </p:tavLst>
+                                    </p:anim>
+                                    <p:animEffect transition="in" filter="fade">
+                                      <p:cBhvr>
+                                        <p:cTn id="14" dur="500"/>
+                                        <p:tgtEl>
+                                          <p:spTgt spid="4"/>
+                                        </p:tgtEl>
+                                      </p:cBhvr>
+                                    </p:animEffect>
+                                  </p:childTnLst>
+                                </p:cTn>
+                              </p:par>
+                            </p:childTnLst>
+                          </p:cTn>
+                        </p:par>
+                      </p:childTnLst>
+                    </p:cTn>
+                  </p:par>
+                </p:childTnLst>
+              </p:cTn>
+              <p:prevCondLst>
+                <p:cond evt="onPrev" delay="0">
+                  <p:tgtEl>
+                    <p:sldTgt/>
+                  </p:tgtEl>
+                </p:cond>
+              </p:prevCondLst>
+              <p:nextCondLst>
+                <p:cond evt="onNext" delay="0">
+                  <p:tgtEl>
+                    <p:sldTgt/>
+                  </p:tgtEl>
+                </p:cond>
+              </p:nextCondLst>
+            </p:seq>
+          </p:childTnLst>
+        </p:cTn>
+      </p:par>
+    </p:tnLst>
+    <p:bldLst>
+      <p:bldP spid="257026" grpId="0" build="p"/>
+    </p:bldLst>
+  </p:timing>
+</p:sld>
+</file>
+
 <file path=ppt/slides/slide2.xml><?xml version="1.0" encoding="utf-8"?>
 <p:sld xmlns:a="http://schemas.openxmlformats.org/drawingml/2006/main" xmlns:r="http://schemas.openxmlformats.org/officeDocument/2006/relationships" xmlns:p="http://schemas.openxmlformats.org/presentationml/2006/main">
   <p:cSld>
@@ -5622,10 +5927,29 @@
                 <a:latin typeface="黑体" panose="02010609060101010101" pitchFamily="49" charset="-122"/>
                 <a:ea typeface="黑体" panose="02010609060101010101" pitchFamily="49" charset="-122"/>
               </a:rPr>
-              <a:t>= X</a:t>
+              <a:t>= </a:t>
+            </a:r>
+            <a:r>
+              <a:rPr lang="en-US" altLang="zh-CN" sz="3600" b="1">
+                <a:solidFill>
+                  <a:srgbClr val="FF0000"/>
+                </a:solidFill>
+                <a:highlight>
+                  <a:srgbClr val="FFFF00"/>
+                </a:highlight>
+                <a:latin typeface="黑体" panose="02010609060101010101" pitchFamily="49" charset="-122"/>
+                <a:ea typeface="黑体" panose="02010609060101010101" pitchFamily="49" charset="-122"/>
+              </a:rPr>
+              <a:t>X</a:t>
             </a:r>
             <a:r>
               <a:rPr lang="en-US" altLang="zh-CN" sz="2800" b="1">
+                <a:solidFill>
+                  <a:srgbClr val="FF0000"/>
+                </a:solidFill>
+                <a:highlight>
+                  <a:srgbClr val="FFFF00"/>
+                </a:highlight>
                 <a:latin typeface="黑体" panose="02010609060101010101" pitchFamily="49" charset="-122"/>
                 <a:ea typeface="黑体" panose="02010609060101010101" pitchFamily="49" charset="-122"/>
               </a:rPr>
@@ -9988,12 +10312,24 @@
             </a:pPr>
             <a:r>
               <a:rPr lang="zh-CN" altLang="en-US" sz="3600" b="1" i="1" dirty="0">
+                <a:solidFill>
+                  <a:srgbClr val="FF0000"/>
+                </a:solidFill>
+                <a:highlight>
+                  <a:srgbClr val="FFFF00"/>
+                </a:highlight>
                 <a:latin typeface="Times New Roman" panose="02020603050405020304" pitchFamily="18" charset="0"/>
                 <a:ea typeface="黑体" panose="02010609060101010101" pitchFamily="49" charset="-122"/>
               </a:rPr>
               <a:t>比较法：用相邻两位乘数比较的结果决定</a:t>
             </a:r>
             <a:endParaRPr lang="zh-CN" altLang="en-US" sz="3600" b="1" i="1" dirty="0">
+              <a:solidFill>
+                <a:srgbClr val="FF0000"/>
+              </a:solidFill>
+              <a:highlight>
+                <a:srgbClr val="FFFF00"/>
+              </a:highlight>
               <a:latin typeface="Times New Roman" panose="02020603050405020304" pitchFamily="18" charset="0"/>
               <a:ea typeface="黑体" panose="02010609060101010101" pitchFamily="49" charset="-122"/>
             </a:endParaRPr>
@@ -10016,6 +10352,12 @@
             </a:r>
             <a:r>
               <a:rPr lang="en-US" altLang="zh-CN" sz="3600" b="1" i="1">
+                <a:solidFill>
+                  <a:srgbClr val="FF0000"/>
+                </a:solidFill>
+                <a:highlight>
+                  <a:srgbClr val="FFFF00"/>
+                </a:highlight>
                 <a:latin typeface="黑体" panose="02010609060101010101" pitchFamily="49" charset="-122"/>
                 <a:ea typeface="黑体" panose="02010609060101010101" pitchFamily="49" charset="-122"/>
               </a:rPr>
@@ -10023,6 +10365,12 @@
             </a:r>
             <a:r>
               <a:rPr lang="zh-CN" altLang="en-US" sz="2800" b="1" i="1" dirty="0">
+                <a:solidFill>
+                  <a:srgbClr val="FF0000"/>
+                </a:solidFill>
+                <a:highlight>
+                  <a:srgbClr val="FFFF00"/>
+                </a:highlight>
                 <a:latin typeface="Times New Roman" panose="02020603050405020304" pitchFamily="18" charset="0"/>
                 <a:ea typeface="黑体" panose="02010609060101010101" pitchFamily="49" charset="-122"/>
               </a:rPr>
@@ -10030,6 +10378,12 @@
             </a:r>
             <a:r>
               <a:rPr lang="zh-CN" altLang="en-US" sz="3600" b="1" i="1" dirty="0">
+                <a:solidFill>
+                  <a:srgbClr val="FF0000"/>
+                </a:solidFill>
+                <a:highlight>
+                  <a:srgbClr val="FFFF00"/>
+                </a:highlight>
                 <a:latin typeface="Times New Roman" panose="02020603050405020304" pitchFamily="18" charset="0"/>
                 <a:ea typeface="黑体" panose="02010609060101010101" pitchFamily="49" charset="-122"/>
               </a:rPr>
@@ -10037,6 +10391,12 @@
             </a:r>
             <a:r>
               <a:rPr lang="en-US" altLang="zh-CN" sz="3600" b="1" i="1">
+                <a:solidFill>
+                  <a:srgbClr val="FF0000"/>
+                </a:solidFill>
+                <a:highlight>
+                  <a:srgbClr val="FFFF00"/>
+                </a:highlight>
                 <a:latin typeface="黑体" panose="02010609060101010101" pitchFamily="49" charset="-122"/>
                 <a:ea typeface="黑体" panose="02010609060101010101" pitchFamily="49" charset="-122"/>
               </a:rPr>
@@ -10044,6 +10404,12 @@
             </a:r>
             <a:r>
               <a:rPr lang="zh-CN" altLang="en-US" sz="2800" b="1" i="1" dirty="0">
+                <a:solidFill>
+                  <a:srgbClr val="FF0000"/>
+                </a:solidFill>
+                <a:highlight>
+                  <a:srgbClr val="FFFF00"/>
+                </a:highlight>
                 <a:latin typeface="黑体" panose="02010609060101010101" pitchFamily="49" charset="-122"/>
                 <a:ea typeface="黑体" panose="02010609060101010101" pitchFamily="49" charset="-122"/>
               </a:rPr>
@@ -10051,6 +10417,12 @@
             </a:r>
             <a:r>
               <a:rPr lang="zh-CN" altLang="en-US" sz="3600" b="1" i="1" dirty="0">
+                <a:solidFill>
+                  <a:srgbClr val="FF0000"/>
+                </a:solidFill>
+                <a:highlight>
+                  <a:srgbClr val="FFFF00"/>
+                </a:highlight>
                 <a:latin typeface="黑体" panose="02010609060101010101" pitchFamily="49" charset="-122"/>
                 <a:ea typeface="黑体" panose="02010609060101010101" pitchFamily="49" charset="-122"/>
               </a:rPr>
@@ -10058,6 +10430,12 @@
             </a:r>
             <a:r>
               <a:rPr lang="en-US" altLang="zh-CN" sz="3600" b="1" i="1">
+                <a:solidFill>
+                  <a:srgbClr val="FF0000"/>
+                </a:solidFill>
+                <a:highlight>
+                  <a:srgbClr val="FFFF00"/>
+                </a:highlight>
                 <a:latin typeface="黑体" panose="02010609060101010101" pitchFamily="49" charset="-122"/>
                 <a:ea typeface="黑体" panose="02010609060101010101" pitchFamily="49" charset="-122"/>
               </a:rPr>
@@ -10065,12 +10443,24 @@
             </a:r>
             <a:r>
               <a:rPr lang="zh-CN" altLang="en-US" sz="3600" b="1" i="1" dirty="0">
+                <a:solidFill>
+                  <a:srgbClr val="FF0000"/>
+                </a:solidFill>
+                <a:highlight>
+                  <a:srgbClr val="FFFF00"/>
+                </a:highlight>
                 <a:latin typeface="黑体" panose="02010609060101010101" pitchFamily="49" charset="-122"/>
                 <a:ea typeface="黑体" panose="02010609060101010101" pitchFamily="49" charset="-122"/>
               </a:rPr>
               <a:t>。</a:t>
             </a:r>
-            <a:endParaRPr lang="zh-CN" altLang="en-US" sz="3600" b="1" i="1">
+            <a:endParaRPr lang="zh-CN" altLang="en-US" sz="3600" b="1" i="1" dirty="0">
+              <a:solidFill>
+                <a:srgbClr val="FF0000"/>
+              </a:solidFill>
+              <a:highlight>
+                <a:srgbClr val="FFFF00"/>
+              </a:highlight>
               <a:latin typeface="黑体" panose="02010609060101010101" pitchFamily="49" charset="-122"/>
               <a:ea typeface="黑体" panose="02010609060101010101" pitchFamily="49" charset="-122"/>
             </a:endParaRPr>
@@ -13515,7 +13905,27 @@
                 <a:latin typeface="黑体" panose="02010609060101010101" pitchFamily="49" charset="-122"/>
                 <a:ea typeface="黑体" panose="02010609060101010101" pitchFamily="49" charset="-122"/>
               </a:rPr>
-              <a:t>00.</a:t>
+              <a:t>0</a:t>
+            </a:r>
+            <a:r>
+              <a:rPr lang="en-US" altLang="zh-CN" sz="3600" b="1">
+                <a:solidFill>
+                  <a:srgbClr val="FF0000"/>
+                </a:solidFill>
+                <a:highlight>
+                  <a:srgbClr val="FFFF00"/>
+                </a:highlight>
+                <a:latin typeface="黑体" panose="02010609060101010101" pitchFamily="49" charset="-122"/>
+                <a:ea typeface="黑体" panose="02010609060101010101" pitchFamily="49" charset="-122"/>
+              </a:rPr>
+              <a:t>0</a:t>
+            </a:r>
+            <a:r>
+              <a:rPr lang="en-US" altLang="zh-CN" sz="3600" b="1">
+                <a:latin typeface="黑体" panose="02010609060101010101" pitchFamily="49" charset="-122"/>
+                <a:ea typeface="黑体" panose="02010609060101010101" pitchFamily="49" charset="-122"/>
+              </a:rPr>
+              <a:t>.</a:t>
             </a:r>
             <a:r>
               <a:rPr lang="en-US" altLang="zh-CN" sz="3600" b="1">
@@ -13567,7 +13977,7 @@
         <p:spPr>
           <a:xfrm>
             <a:off x="5029200" y="1752600"/>
-            <a:ext cx="2057400" cy="641350"/>
+            <a:ext cx="2057400" cy="645160"/>
           </a:xfrm>
           <a:prstGeom prst="rect">
             <a:avLst/>
@@ -13592,7 +14002,37 @@
                 <a:latin typeface="黑体" panose="02010609060101010101" pitchFamily="49" charset="-122"/>
                 <a:ea typeface="黑体" panose="02010609060101010101" pitchFamily="49" charset="-122"/>
               </a:rPr>
-              <a:t>00.</a:t>
+              <a:t>0</a:t>
+            </a:r>
+            <a:r>
+              <a:rPr lang="en-US" altLang="zh-CN" sz="3600" b="1" u="sng">
+                <a:solidFill>
+                  <a:srgbClr val="00B050"/>
+                </a:solidFill>
+                <a:latin typeface="黑体" panose="02010609060101010101" pitchFamily="49" charset="-122"/>
+                <a:ea typeface="黑体" panose="02010609060101010101" pitchFamily="49" charset="-122"/>
+              </a:rPr>
+              <a:t>0</a:t>
+            </a:r>
+            <a:r>
+              <a:rPr lang="en-US" altLang="zh-CN" sz="3600" b="1">
+                <a:latin typeface="黑体" panose="02010609060101010101" pitchFamily="49" charset="-122"/>
+                <a:ea typeface="黑体" panose="02010609060101010101" pitchFamily="49" charset="-122"/>
+              </a:rPr>
+              <a:t>.</a:t>
+            </a:r>
+            <a:r>
+              <a:rPr lang="en-US" altLang="zh-CN" sz="3600" b="1">
+                <a:solidFill>
+                  <a:srgbClr val="FF0000"/>
+                </a:solidFill>
+                <a:highlight>
+                  <a:srgbClr val="FFFF00"/>
+                </a:highlight>
+                <a:latin typeface="黑体" panose="02010609060101010101" pitchFamily="49" charset="-122"/>
+                <a:ea typeface="黑体" panose="02010609060101010101" pitchFamily="49" charset="-122"/>
+              </a:rPr>
+              <a:t>0</a:t>
             </a:r>
             <a:r>
               <a:rPr lang="en-US" altLang="zh-CN" sz="3600" b="1">
@@ -13602,7 +14042,7 @@
                 <a:latin typeface="黑体" panose="02010609060101010101" pitchFamily="49" charset="-122"/>
                 <a:ea typeface="黑体" panose="02010609060101010101" pitchFamily="49" charset="-122"/>
               </a:rPr>
-              <a:t>0110</a:t>
+              <a:t>110</a:t>
             </a:r>
             <a:endParaRPr lang="en-US" altLang="zh-CN" sz="3600" b="1">
               <a:latin typeface="黑体" panose="02010609060101010101" pitchFamily="49" charset="-122"/>
@@ -13889,7 +14329,7 @@
         <p:spPr>
           <a:xfrm>
             <a:off x="5029200" y="2667000"/>
-            <a:ext cx="2209800" cy="641350"/>
+            <a:ext cx="2209800" cy="645160"/>
           </a:xfrm>
           <a:prstGeom prst="rect">
             <a:avLst/>
@@ -13914,7 +14354,27 @@
                 <a:latin typeface="黑体" panose="02010609060101010101" pitchFamily="49" charset="-122"/>
                 <a:ea typeface="黑体" panose="02010609060101010101" pitchFamily="49" charset="-122"/>
               </a:rPr>
-              <a:t>11.</a:t>
+              <a:t>1</a:t>
+            </a:r>
+            <a:r>
+              <a:rPr lang="en-US" altLang="zh-CN" sz="3600" b="1">
+                <a:solidFill>
+                  <a:srgbClr val="FF0000"/>
+                </a:solidFill>
+                <a:highlight>
+                  <a:srgbClr val="FFFF00"/>
+                </a:highlight>
+                <a:latin typeface="黑体" panose="02010609060101010101" pitchFamily="49" charset="-122"/>
+                <a:ea typeface="黑体" panose="02010609060101010101" pitchFamily="49" charset="-122"/>
+              </a:rPr>
+              <a:t>1</a:t>
+            </a:r>
+            <a:r>
+              <a:rPr lang="en-US" altLang="zh-CN" sz="3600" b="1">
+                <a:latin typeface="黑体" panose="02010609060101010101" pitchFamily="49" charset="-122"/>
+                <a:ea typeface="黑体" panose="02010609060101010101" pitchFamily="49" charset="-122"/>
+              </a:rPr>
+              <a:t>.</a:t>
             </a:r>
             <a:r>
               <a:rPr lang="en-US" altLang="zh-CN" sz="3600" b="1">
@@ -13945,7 +14405,7 @@
         <p:spPr>
           <a:xfrm>
             <a:off x="5029200" y="3124200"/>
-            <a:ext cx="2133600" cy="641350"/>
+            <a:ext cx="2133600" cy="645160"/>
           </a:xfrm>
           <a:prstGeom prst="rect">
             <a:avLst/>
@@ -13973,21 +14433,34 @@
               <a:t>1</a:t>
             </a:r>
             <a:r>
+              <a:rPr lang="en-US" altLang="zh-CN" sz="3600" b="1" u="sng">
+                <a:solidFill>
+                  <a:srgbClr val="00B050"/>
+                </a:solidFill>
+                <a:latin typeface="黑体" panose="02010609060101010101" pitchFamily="49" charset="-122"/>
+                <a:ea typeface="黑体" panose="02010609060101010101" pitchFamily="49" charset="-122"/>
+              </a:rPr>
+              <a:t>1</a:t>
+            </a:r>
+            <a:r>
+              <a:rPr lang="en-US" altLang="zh-CN" sz="3600" b="1">
+                <a:latin typeface="黑体" panose="02010609060101010101" pitchFamily="49" charset="-122"/>
+                <a:ea typeface="黑体" panose="02010609060101010101" pitchFamily="49" charset="-122"/>
+              </a:rPr>
+              <a:t>.</a:t>
+            </a:r>
+            <a:r>
               <a:rPr lang="en-US" altLang="zh-CN" sz="3600" b="1">
                 <a:solidFill>
-                  <a:srgbClr val="C00000"/>
+                  <a:srgbClr val="FF0000"/>
                 </a:solidFill>
+                <a:highlight>
+                  <a:srgbClr val="FFFF00"/>
+                </a:highlight>
                 <a:latin typeface="黑体" panose="02010609060101010101" pitchFamily="49" charset="-122"/>
                 <a:ea typeface="黑体" panose="02010609060101010101" pitchFamily="49" charset="-122"/>
               </a:rPr>
               <a:t>1</a:t>
-            </a:r>
-            <a:r>
-              <a:rPr lang="en-US" altLang="zh-CN" sz="3600" b="1">
-                <a:latin typeface="黑体" panose="02010609060101010101" pitchFamily="49" charset="-122"/>
-                <a:ea typeface="黑体" panose="02010609060101010101" pitchFamily="49" charset="-122"/>
-              </a:rPr>
-              <a:t>.</a:t>
             </a:r>
             <a:r>
               <a:rPr lang="en-US" altLang="zh-CN" sz="3600" b="1">
@@ -13997,7 +14470,7 @@
                 <a:latin typeface="黑体" panose="02010609060101010101" pitchFamily="49" charset="-122"/>
                 <a:ea typeface="黑体" panose="02010609060101010101" pitchFamily="49" charset="-122"/>
               </a:rPr>
-              <a:t>1100</a:t>
+              <a:t>100</a:t>
             </a:r>
             <a:endParaRPr lang="en-US" altLang="zh-CN" sz="3600" b="1">
               <a:latin typeface="黑体" panose="02010609060101010101" pitchFamily="49" charset="-122"/>
@@ -19633,6 +20106,12 @@
             </a:r>
             <a:r>
               <a:rPr lang="zh-CN" altLang="en-US" sz="2400" b="1" dirty="0">
+                <a:solidFill>
+                  <a:srgbClr val="00B050"/>
+                </a:solidFill>
+                <a:highlight>
+                  <a:srgbClr val="FF0000"/>
+                </a:highlight>
                 <a:latin typeface="楷体" panose="02010609060101010101" pitchFamily="49" charset="-122"/>
                 <a:ea typeface="楷体" panose="02010609060101010101" pitchFamily="49" charset="-122"/>
               </a:rPr>
@@ -19640,6 +20119,12 @@
             </a:r>
             <a:r>
               <a:rPr lang="en-US" altLang="zh-CN" sz="2400" b="1" dirty="0">
+                <a:solidFill>
+                  <a:srgbClr val="00B050"/>
+                </a:solidFill>
+                <a:highlight>
+                  <a:srgbClr val="FF0000"/>
+                </a:highlight>
                 <a:latin typeface="楷体" panose="02010609060101010101" pitchFamily="49" charset="-122"/>
                 <a:ea typeface="楷体" panose="02010609060101010101" pitchFamily="49" charset="-122"/>
               </a:rPr>
@@ -19647,6 +20132,12 @@
             </a:r>
             <a:r>
               <a:rPr lang="zh-CN" altLang="en-US" sz="2400" b="1" dirty="0">
+                <a:solidFill>
+                  <a:srgbClr val="00B050"/>
+                </a:solidFill>
+                <a:highlight>
+                  <a:srgbClr val="FF0000"/>
+                </a:highlight>
                 <a:latin typeface="楷体" panose="02010609060101010101" pitchFamily="49" charset="-122"/>
                 <a:ea typeface="楷体" panose="02010609060101010101" pitchFamily="49" charset="-122"/>
               </a:rPr>
@@ -19654,6 +20145,12 @@
             </a:r>
             <a:r>
               <a:rPr lang="en-US" altLang="zh-CN" sz="2400" b="1" dirty="0">
+                <a:solidFill>
+                  <a:srgbClr val="00B050"/>
+                </a:solidFill>
+                <a:highlight>
+                  <a:srgbClr val="FF0000"/>
+                </a:highlight>
                 <a:latin typeface="楷体" panose="02010609060101010101" pitchFamily="49" charset="-122"/>
                 <a:ea typeface="楷体" panose="02010609060101010101" pitchFamily="49" charset="-122"/>
               </a:rPr>
@@ -19661,6 +20158,12 @@
             </a:r>
             <a:r>
               <a:rPr lang="en-US" altLang="zh-CN" sz="2400" b="1" baseline="-25000" dirty="0">
+                <a:solidFill>
+                  <a:srgbClr val="00B050"/>
+                </a:solidFill>
+                <a:highlight>
+                  <a:srgbClr val="FF0000"/>
+                </a:highlight>
                 <a:latin typeface="楷体" panose="02010609060101010101" pitchFamily="49" charset="-122"/>
                 <a:ea typeface="楷体" panose="02010609060101010101" pitchFamily="49" charset="-122"/>
               </a:rPr>
@@ -21009,58 +21512,9 @@
         <p:nvPr/>
       </p:nvGrpSpPr>
       <p:grpSpPr/>
-      <p:sp>
-        <p:nvSpPr>
-          <p:cNvPr id="257026" name="Text Box 2"/>
-          <p:cNvSpPr txBox="1"/>
-          <p:nvPr/>
-        </p:nvSpPr>
-        <p:spPr>
-          <a:xfrm>
-            <a:off x="107950" y="116840"/>
-            <a:ext cx="5562600" cy="641350"/>
-          </a:xfrm>
-          <a:prstGeom prst="rect">
-            <a:avLst/>
-          </a:prstGeom>
-          <a:noFill/>
-          <a:ln w="9525">
-            <a:noFill/>
-          </a:ln>
-        </p:spPr>
-        <p:txBody>
-          <a:bodyPr>
-            <a:spAutoFit/>
-          </a:bodyPr>
-          <a:p>
-            <a:pPr>
-              <a:spcBef>
-                <a:spcPct val="50000"/>
-              </a:spcBef>
-            </a:pPr>
-            <a:r>
-              <a:rPr lang="en-US" altLang="zh-CN" sz="3600" b="1" dirty="0">
-                <a:latin typeface="Times New Roman" panose="02020603050405020304" pitchFamily="18" charset="0"/>
-              </a:rPr>
-              <a:t>3. </a:t>
-            </a:r>
-            <a:r>
-              <a:rPr lang="zh-CN" altLang="en-US" sz="3600" b="1" dirty="0">
-                <a:latin typeface="Times New Roman" panose="02020603050405020304" pitchFamily="18" charset="0"/>
-                <a:ea typeface="黑体" panose="02010609060101010101" pitchFamily="49" charset="-122"/>
-              </a:rPr>
-              <a:t>逻辑实现</a:t>
-            </a:r>
-            <a:endParaRPr lang="zh-CN" altLang="en-US" sz="3600" b="1" dirty="0">
-              <a:latin typeface="Times New Roman" panose="02020603050405020304" pitchFamily="18" charset="0"/>
-              <a:ea typeface="黑体" panose="02010609060101010101" pitchFamily="49" charset="-122"/>
-            </a:endParaRPr>
-          </a:p>
-        </p:txBody>
-      </p:sp>
       <p:pic>
         <p:nvPicPr>
-          <p:cNvPr id="4" name="图片 3"/>
+          <p:cNvPr id="2" name="图片 1"/>
           <p:cNvPicPr>
             <a:picLocks noChangeAspect="1"/>
           </p:cNvPicPr>
@@ -21074,8 +21528,8 @@
         </p:blipFill>
         <p:spPr>
           <a:xfrm>
-            <a:off x="213360" y="845185"/>
-            <a:ext cx="8395335" cy="5561330"/>
+            <a:off x="611505" y="44450"/>
+            <a:ext cx="7637145" cy="6761480"/>
           </a:xfrm>
           <a:prstGeom prst="rect">
             <a:avLst/>
@@ -21087,199 +21541,6 @@
   <p:clrMapOvr>
     <a:masterClrMapping/>
   </p:clrMapOvr>
-  <p:timing>
-    <p:tnLst>
-      <p:par>
-        <p:cTn id="1" dur="indefinite" restart="never" nodeType="tmRoot">
-          <p:childTnLst>
-            <p:seq concurrent="1" nextAc="seek">
-              <p:cTn id="2" dur="indefinite" nodeType="mainSeq">
-                <p:childTnLst>
-                  <p:par>
-                    <p:cTn id="3" fill="hold">
-                      <p:stCondLst>
-                        <p:cond delay="indefinite"/>
-                      </p:stCondLst>
-                      <p:childTnLst>
-                        <p:par>
-                          <p:cTn id="4" fill="hold">
-                            <p:stCondLst>
-                              <p:cond delay="0"/>
-                            </p:stCondLst>
-                            <p:childTnLst>
-                              <p:par>
-                                <p:cTn id="5" presetID="22" presetClass="entr" presetSubtype="8" fill="hold" grpId="0" nodeType="clickEffect">
-                                  <p:stCondLst>
-                                    <p:cond delay="0"/>
-                                  </p:stCondLst>
-                                  <p:childTnLst>
-                                    <p:set>
-                                      <p:cBhvr>
-                                        <p:cTn id="6" dur="1" fill="hold">
-                                          <p:stCondLst>
-                                            <p:cond delay="0"/>
-                                          </p:stCondLst>
-                                        </p:cTn>
-                                        <p:tgtEl>
-                                          <p:spTgt spid="257026">
-                                            <p:txEl>
-                                              <p:charRg st="0" end="8"/>
-                                            </p:txEl>
-                                          </p:spTgt>
-                                        </p:tgtEl>
-                                        <p:attrNameLst>
-                                          <p:attrName>style.visibility</p:attrName>
-                                        </p:attrNameLst>
-                                      </p:cBhvr>
-                                      <p:to>
-                                        <p:strVal val="visible"/>
-                                      </p:to>
-                                    </p:set>
-                                    <p:animEffect transition="in" filter="wipe(left)">
-                                      <p:cBhvr>
-                                        <p:cTn id="7" dur="500"/>
-                                        <p:tgtEl>
-                                          <p:spTgt spid="257026">
-                                            <p:txEl>
-                                              <p:charRg st="0" end="8"/>
-                                            </p:txEl>
-                                          </p:spTgt>
-                                        </p:tgtEl>
-                                      </p:cBhvr>
-                                    </p:animEffect>
-                                  </p:childTnLst>
-                                </p:cTn>
-                              </p:par>
-                            </p:childTnLst>
-                          </p:cTn>
-                        </p:par>
-                      </p:childTnLst>
-                    </p:cTn>
-                  </p:par>
-                  <p:par>
-                    <p:cTn id="8" fill="hold">
-                      <p:stCondLst>
-                        <p:cond delay="indefinite"/>
-                      </p:stCondLst>
-                      <p:childTnLst>
-                        <p:par>
-                          <p:cTn id="9" fill="hold">
-                            <p:stCondLst>
-                              <p:cond delay="0"/>
-                            </p:stCondLst>
-                            <p:childTnLst>
-                              <p:par>
-                                <p:cTn id="10" presetID="53" presetClass="entr" presetSubtype="16" fill="hold" nodeType="clickEffect">
-                                  <p:stCondLst>
-                                    <p:cond delay="0"/>
-                                  </p:stCondLst>
-                                  <p:childTnLst>
-                                    <p:set>
-                                      <p:cBhvr>
-                                        <p:cTn id="11" dur="1" fill="hold">
-                                          <p:stCondLst>
-                                            <p:cond delay="0"/>
-                                          </p:stCondLst>
-                                        </p:cTn>
-                                        <p:tgtEl>
-                                          <p:spTgt spid="4"/>
-                                        </p:tgtEl>
-                                        <p:attrNameLst>
-                                          <p:attrName>style.visibility</p:attrName>
-                                        </p:attrNameLst>
-                                      </p:cBhvr>
-                                      <p:to>
-                                        <p:strVal val="visible"/>
-                                      </p:to>
-                                    </p:set>
-                                    <p:anim calcmode="lin" valueType="num">
-                                      <p:cBhvr>
-                                        <p:cTn id="12" dur="500" fill="hold"/>
-                                        <p:tgtEl>
-                                          <p:spTgt spid="4"/>
-                                        </p:tgtEl>
-                                        <p:attrNameLst>
-                                          <p:attrName>ppt_w</p:attrName>
-                                        </p:attrNameLst>
-                                      </p:cBhvr>
-                                      <p:tavLst>
-                                        <p:tav tm="0">
-                                          <p:val>
-                                            <p:fltVal val="0"/>
-                                          </p:val>
-                                        </p:tav>
-                                        <p:tav tm="100000">
-                                          <p:val>
-                                            <p:strVal val="#ppt_w"/>
-                                          </p:val>
-                                        </p:tav>
-                                      </p:tavLst>
-                                    </p:anim>
-                                    <p:anim calcmode="lin" valueType="num">
-                                      <p:cBhvr>
-                                        <p:cTn id="13" dur="500" fill="hold"/>
-                                        <p:tgtEl>
-                                          <p:spTgt spid="4"/>
-                                        </p:tgtEl>
-                                        <p:attrNameLst>
-                                          <p:attrName>ppt_h</p:attrName>
-                                        </p:attrNameLst>
-                                      </p:cBhvr>
-                                      <p:tavLst>
-                                        <p:tav tm="0">
-                                          <p:val>
-                                            <p:fltVal val="0"/>
-                                          </p:val>
-                                        </p:tav>
-                                        <p:tav tm="100000">
-                                          <p:val>
-                                            <p:strVal val="#ppt_h"/>
-                                          </p:val>
-                                        </p:tav>
-                                      </p:tavLst>
-                                    </p:anim>
-                                    <p:animEffect transition="in" filter="fade">
-                                      <p:cBhvr>
-                                        <p:cTn id="14" dur="500"/>
-                                        <p:tgtEl>
-                                          <p:spTgt spid="4"/>
-                                        </p:tgtEl>
-                                      </p:cBhvr>
-                                    </p:animEffect>
-                                  </p:childTnLst>
-                                </p:cTn>
-                              </p:par>
-                            </p:childTnLst>
-                          </p:cTn>
-                        </p:par>
-                      </p:childTnLst>
-                    </p:cTn>
-                  </p:par>
-                </p:childTnLst>
-              </p:cTn>
-              <p:prevCondLst>
-                <p:cond evt="onPrev" delay="0">
-                  <p:tgtEl>
-                    <p:sldTgt/>
-                  </p:tgtEl>
-                </p:cond>
-              </p:prevCondLst>
-              <p:nextCondLst>
-                <p:cond evt="onNext" delay="0">
-                  <p:tgtEl>
-                    <p:sldTgt/>
-                  </p:tgtEl>
-                </p:cond>
-              </p:nextCondLst>
-            </p:seq>
-          </p:childTnLst>
-        </p:cTn>
-      </p:par>
-    </p:tnLst>
-    <p:bldLst>
-      <p:bldP spid="257026" grpId="0" build="p"/>
-    </p:bldLst>
-  </p:timing>
 </p:sld>
 </file>
 
